--- a/Foundation_F2/Workshop/F2-W04_Apply_Workshop_L07-L08_Me_and_My_Partner.pptx
+++ b/Foundation_F2/Workshop/F2-W04_Apply_Workshop_L07-L08_Me_and_My_Partner.pptx
@@ -7436,7 +7436,7 @@
                 <a:latin typeface="Calibri" pitchFamily="34" charset="0"/>
                 <a:cs typeface="Amiri" pitchFamily="2" charset="-78"/>
               </a:rPr>
-              <a:t>Odd numbers come from F2-L07, even numbers from F2-L08. Core: a full sentence from the starter. Develop: add the “more” part. Stretch: link two answers with </a:t>
+              <a:t>Odd numbers come from F2-L07, even numbers from F2-L08. Core: a full sentence from the starter. Develop: add the “more” part. Stretch: link two answers with ‏</a:t>
             </a:r>
             <a:pPr algn="l" indent="0" marL="0">
               <a:buNone/>
@@ -7463,7 +7463,7 @@
                 <a:latin typeface="Calibri" pitchFamily="34" charset="0"/>
                 <a:cs typeface="Amiri" pitchFamily="2" charset="-78"/>
               </a:rPr>
-              <a:t>, </a:t>
+              <a:t>‏, ‏</a:t>
             </a:r>
             <a:pPr algn="l" indent="0" marL="0">
               <a:buNone/>
@@ -7490,7 +7490,7 @@
                 <a:latin typeface="Calibri" pitchFamily="34" charset="0"/>
                 <a:cs typeface="Amiri" pitchFamily="2" charset="-78"/>
               </a:rPr>
-              <a:t> or </a:t>
+              <a:t>‏ or ‏</a:t>
             </a:r>
             <a:pPr algn="l" indent="0" marL="0">
               <a:buNone/>
@@ -7517,7 +7517,7 @@
                 <a:latin typeface="Calibri" pitchFamily="34" charset="0"/>
                 <a:cs typeface="Amiri" pitchFamily="2" charset="-78"/>
               </a:rPr>
-              <a:t>. Swap after each question.</a:t>
+              <a:t>‏. Swap after each question.</a:t>
             </a:r>
             <a:endParaRPr lang="en-US" sz="1100" dirty="0"/>
           </a:p>
@@ -8783,7 +8783,7 @@
                 <a:latin typeface="Calibri" pitchFamily="34" charset="0"/>
                 <a:cs typeface="Amiri" pitchFamily="2" charset="-78"/>
               </a:rPr>
-              <a:t>Name two languages with </a:t>
+              <a:t>Name two languages with ‏</a:t>
             </a:r>
             <a:pPr algn="l" indent="0" marL="0">
               <a:buNone/>
@@ -8810,7 +8810,7 @@
                 <a:latin typeface="Calibri" pitchFamily="34" charset="0"/>
                 <a:cs typeface="Amiri" pitchFamily="2" charset="-78"/>
               </a:rPr>
-              <a:t>.</a:t>
+              <a:t>‏.</a:t>
             </a:r>
             <a:endParaRPr lang="en-US" sz="1100" dirty="0"/>
           </a:p>
@@ -10867,7 +10867,7 @@
                 <a:latin typeface="Calibri" pitchFamily="34" charset="0"/>
                 <a:cs typeface="Amiri" pitchFamily="2" charset="-78"/>
               </a:rPr>
-              <a:t>Use he / she verbs: </a:t>
+              <a:t>Use he / she verbs: ‏</a:t>
             </a:r>
             <a:pPr algn="l" indent="0" marL="0">
               <a:buNone/>
@@ -10921,7 +10921,7 @@
                 <a:latin typeface="Calibri" pitchFamily="34" charset="0"/>
                 <a:cs typeface="Amiri" pitchFamily="2" charset="-78"/>
               </a:rPr>
-              <a:t>.</a:t>
+              <a:t>‏.</a:t>
             </a:r>
             <a:endParaRPr lang="en-US" sz="1150" dirty="0"/>
           </a:p>
@@ -11058,7 +11058,7 @@
                 <a:latin typeface="Calibri" pitchFamily="34" charset="0"/>
                 <a:cs typeface="Amiri" pitchFamily="2" charset="-78"/>
               </a:rPr>
-              <a:t>Compare: </a:t>
+              <a:t>Compare: ‏</a:t>
             </a:r>
             <a:pPr algn="l" indent="0" marL="0">
               <a:buNone/>
@@ -11085,7 +11085,7 @@
                 <a:latin typeface="Calibri" pitchFamily="34" charset="0"/>
                 <a:cs typeface="Amiri" pitchFamily="2" charset="-78"/>
               </a:rPr>
-              <a:t> …</a:t>
+              <a:t> …‏</a:t>
             </a:r>
             <a:endParaRPr lang="en-US" sz="1150" dirty="0"/>
           </a:p>
@@ -17500,7 +17500,7 @@
                 <a:latin typeface="Calibri" pitchFamily="34" charset="0"/>
                 <a:cs typeface="Amiri" pitchFamily="2" charset="-78"/>
               </a:rPr>
-              <a:t>Join two facts with </a:t>
+              <a:t>Join two facts with ‏</a:t>
             </a:r>
             <a:pPr algn="l" indent="0" marL="0">
               <a:buNone/>
@@ -17527,7 +17527,7 @@
                 <a:latin typeface="Calibri" pitchFamily="34" charset="0"/>
                 <a:cs typeface="Amiri" pitchFamily="2" charset="-78"/>
               </a:rPr>
-              <a:t>.</a:t>
+              <a:t>‏.</a:t>
             </a:r>
             <a:endParaRPr lang="en-US" sz="1150" dirty="0"/>
           </a:p>
@@ -17738,7 +17738,7 @@
                 <a:latin typeface="Calibri" pitchFamily="34" charset="0"/>
                 <a:cs typeface="Amiri" pitchFamily="2" charset="-78"/>
               </a:rPr>
-              <a:t>She → ta-: </a:t>
+              <a:t>She → ta-: ‏</a:t>
             </a:r>
             <a:pPr algn="l" indent="0" marL="0">
               <a:buNone/>
@@ -17765,7 +17765,7 @@
                 <a:latin typeface="Calibri" pitchFamily="34" charset="0"/>
                 <a:cs typeface="Amiri" pitchFamily="2" charset="-78"/>
               </a:rPr>
-              <a:t>.</a:t>
+              <a:t>‏.</a:t>
             </a:r>
             <a:endParaRPr lang="en-US" sz="1150" dirty="0"/>
           </a:p>
@@ -17969,6 +17969,19 @@
               <a:buNone/>
             </a:pPr>
             <a:r>
+              <a:rPr lang="en-US" sz="1150" b="1" dirty="0">
+                <a:solidFill>
+                  <a:srgbClr val="1B3B6F"/>
+                </a:solidFill>
+                <a:latin typeface="Calibri" pitchFamily="34" charset="0"/>
+                <a:cs typeface="Amiri" pitchFamily="2" charset="-78"/>
+              </a:rPr>
+              <a:t>‏</a:t>
+            </a:r>
+            <a:pPr algn="l" indent="0" marL="0">
+              <a:buNone/>
+            </a:pPr>
+            <a:r>
               <a:rPr lang="ar-SA" altLang="en-US" sz="1500" b="1" dirty="0">
                 <a:solidFill>
                   <a:srgbClr val="1B3B6F"/>
@@ -17990,7 +18003,7 @@
                 <a:latin typeface="Calibri" pitchFamily="34" charset="0"/>
                 <a:cs typeface="Amiri" pitchFamily="2" charset="-78"/>
               </a:rPr>
-              <a:t> usually comes at the end.</a:t>
+              <a:t>‏ usually comes at the end.</a:t>
             </a:r>
             <a:endParaRPr lang="en-US" sz="1150" dirty="0"/>
           </a:p>
@@ -20031,20 +20044,20 @@
               <a:buNone/>
             </a:pPr>
             <a:r>
-              <a:rPr lang="en-US" sz="1250" b="1" dirty="0">
+              <a:rPr lang="en-US" sz="1200" b="1" dirty="0">
                 <a:solidFill>
                   <a:srgbClr val="1F2A37"/>
                 </a:solidFill>
                 <a:latin typeface="Calibri" pitchFamily="34" charset="0"/>
                 <a:cs typeface="Amiri" pitchFamily="2" charset="-78"/>
               </a:rPr>
-              <a:t>Write a profile (about 40–60 words) for the class website in two parts. Part 1 · ME: name and age · where you are from and live · languages. Part 2 · MY PARTNER (he / she): name and age · where he / she lives · languages · hobby. Use </a:t>
+              <a:t>Write a profile (about 40–60 words) for the class website in two parts. Part 1 · ME: name and age · where you are from and live · languages. Part 2 · MY PARTNER (he / she): name and age · where he / she lives · languages · hobby. Use ‏</a:t>
             </a:r>
             <a:pPr algn="l" indent="0" marL="0">
               <a:buNone/>
             </a:pPr>
             <a:r>
-              <a:rPr lang="ar-SA" altLang="en-US" sz="1650" b="1" dirty="0">
+              <a:rPr lang="ar-SA" altLang="en-US" sz="1550" b="1" dirty="0">
                 <a:solidFill>
                   <a:srgbClr val="1F2A37"/>
                 </a:solidFill>
@@ -20058,20 +20071,20 @@
               <a:buNone/>
             </a:pPr>
             <a:r>
-              <a:rPr lang="en-US" sz="1250" b="1" dirty="0">
+              <a:rPr lang="en-US" sz="1200" b="1" dirty="0">
                 <a:solidFill>
                   <a:srgbClr val="1F2A37"/>
                 </a:solidFill>
                 <a:latin typeface="Calibri" pitchFamily="34" charset="0"/>
                 <a:cs typeface="Amiri" pitchFamily="2" charset="-78"/>
               </a:rPr>
-              <a:t> and </a:t>
+              <a:t>‏ and ‏</a:t>
             </a:r>
             <a:pPr algn="l" indent="0" marL="0">
               <a:buNone/>
             </a:pPr>
             <a:r>
-              <a:rPr lang="ar-SA" altLang="en-US" sz="1650" b="1" dirty="0">
+              <a:rPr lang="ar-SA" altLang="en-US" sz="1550" b="1" dirty="0">
                 <a:solidFill>
                   <a:srgbClr val="1F2A37"/>
                 </a:solidFill>
@@ -20085,16 +20098,16 @@
               <a:buNone/>
             </a:pPr>
             <a:r>
-              <a:rPr lang="en-US" sz="1250" b="1" dirty="0">
+              <a:rPr lang="en-US" sz="1200" b="1" dirty="0">
                 <a:solidFill>
                   <a:srgbClr val="1F2A37"/>
                 </a:solidFill>
                 <a:latin typeface="Calibri" pitchFamily="34" charset="0"/>
                 <a:cs typeface="Amiri" pitchFamily="2" charset="-78"/>
               </a:rPr>
-              <a:t> at least twice.</a:t>
-            </a:r>
-            <a:endParaRPr lang="en-US" sz="1250" dirty="0"/>
+              <a:t>‏ at least twice.</a:t>
+            </a:r>
+            <a:endParaRPr lang="en-US" sz="1200" dirty="0"/>
           </a:p>
         </p:txBody>
       </p:sp>
@@ -20244,7 +20257,7 @@
                 <a:latin typeface="Calibri" pitchFamily="34" charset="0"/>
                 <a:cs typeface="Amiri" pitchFamily="2" charset="-78"/>
               </a:rPr>
-              <a:t>☐  At least one </a:t>
+              <a:t>☐  At least one ‏</a:t>
             </a:r>
             <a:pPr algn="l" indent="0" marL="0">
               <a:buNone/>
@@ -20271,7 +20284,7 @@
                 <a:latin typeface="Calibri" pitchFamily="34" charset="0"/>
                 <a:cs typeface="Amiri" pitchFamily="2" charset="-78"/>
               </a:rPr>
-              <a:t> and one </a:t>
+              <a:t>‏ and one ‏</a:t>
             </a:r>
             <a:pPr algn="l" indent="0" marL="0">
               <a:buNone/>
@@ -20298,7 +20311,7 @@
                 <a:latin typeface="Calibri" pitchFamily="34" charset="0"/>
                 <a:cs typeface="Amiri" pitchFamily="2" charset="-78"/>
               </a:rPr>
-              <a:t> (Develop).</a:t>
+              <a:t>‏ (Develop).</a:t>
             </a:r>
             <a:endParaRPr lang="en-US" sz="1200" dirty="0"/>
           </a:p>
@@ -24005,7 +24018,7 @@
                 <a:latin typeface="Calibri" pitchFamily="34" charset="0"/>
                 <a:cs typeface="Amiri" pitchFamily="2" charset="-78"/>
               </a:rPr>
-              <a:t>use linking words (</a:t>
+              <a:t>use linking words (‏</a:t>
             </a:r>
             <a:pPr algn="l" indent="0" marL="0">
               <a:buNone/>
@@ -24113,7 +24126,7 @@
                 <a:latin typeface="Calibri" pitchFamily="34" charset="0"/>
                 <a:cs typeface="Amiri" pitchFamily="2" charset="-78"/>
               </a:rPr>
-              <a:t>)?</a:t>
+              <a:t>‏)?</a:t>
             </a:r>
             <a:endParaRPr lang="en-US" sz="1100" dirty="0"/>
           </a:p>
@@ -28059,7 +28072,7 @@
                 <a:latin typeface="Calibri" pitchFamily="34" charset="0"/>
                 <a:cs typeface="Amiri" pitchFamily="2" charset="-78"/>
               </a:rPr>
-              <a:t>I added reasons (</a:t>
+              <a:t>I added reasons (‏</a:t>
             </a:r>
             <a:pPr algn="l" indent="0" marL="0">
               <a:buNone/>
@@ -28086,7 +28099,7 @@
                 <a:latin typeface="Calibri" pitchFamily="34" charset="0"/>
                 <a:cs typeface="Amiri" pitchFamily="2" charset="-78"/>
               </a:rPr>
-              <a:t>) and extra details without frames.</a:t>
+              <a:t>‏) and extra details without frames.</a:t>
             </a:r>
             <a:endParaRPr lang="en-US" sz="1300" dirty="0"/>
           </a:p>
@@ -32214,7 +32227,7 @@
                 <a:latin typeface="Calibri" pitchFamily="34" charset="0"/>
                 <a:cs typeface="Amiri" pitchFamily="2" charset="-78"/>
               </a:rPr>
-              <a:t>☐  Add a reason (</a:t>
+              <a:t>☐  Add a reason (‏</a:t>
             </a:r>
             <a:pPr algn="l" indent="0" marL="0">
               <a:buNone/>
@@ -32241,7 +32254,7 @@
                 <a:latin typeface="Calibri" pitchFamily="34" charset="0"/>
                 <a:cs typeface="Amiri" pitchFamily="2" charset="-78"/>
               </a:rPr>
-              <a:t>) and an extra detail to every point.</a:t>
+              <a:t>‏) and an extra detail to every point.</a:t>
             </a:r>
             <a:endParaRPr lang="en-US" sz="1300" dirty="0"/>
           </a:p>
@@ -33762,7 +33775,7 @@
                 <a:latin typeface="Calibri" pitchFamily="34" charset="0"/>
                 <a:cs typeface="Amiri" pitchFamily="2" charset="-78"/>
               </a:rPr>
-              <a:t>Join a word from each lesson in one sentence with </a:t>
+              <a:t>Join a word from each lesson in one sentence with ‏</a:t>
             </a:r>
             <a:pPr algn="l" indent="0" marL="0">
               <a:buNone/>
@@ -33789,7 +33802,7 @@
                 <a:latin typeface="Calibri" pitchFamily="34" charset="0"/>
                 <a:cs typeface="Amiri" pitchFamily="2" charset="-78"/>
               </a:rPr>
-              <a:t> or </a:t>
+              <a:t>‏ or ‏</a:t>
             </a:r>
             <a:pPr algn="l" indent="0" marL="0">
               <a:buNone/>
@@ -33816,7 +33829,7 @@
                 <a:latin typeface="Calibri" pitchFamily="34" charset="0"/>
                 <a:cs typeface="Amiri" pitchFamily="2" charset="-78"/>
               </a:rPr>
-              <a:t>.</a:t>
+              <a:t>‏.</a:t>
             </a:r>
             <a:endParaRPr lang="en-US" sz="1150" dirty="0"/>
           </a:p>
@@ -35679,7 +35692,7 @@
                 <a:latin typeface="Calibri" pitchFamily="34" charset="0"/>
                 <a:cs typeface="Amiri" pitchFamily="2" charset="-78"/>
               </a:rPr>
-              <a:t>Attached: </a:t>
+              <a:t>Attached: ‏</a:t>
             </a:r>
             <a:pPr algn="l" indent="0" marL="0">
               <a:buNone/>
@@ -35733,7 +35746,7 @@
                 <a:latin typeface="Calibri" pitchFamily="34" charset="0"/>
                 <a:cs typeface="Amiri" pitchFamily="2" charset="-78"/>
               </a:rPr>
-              <a:t>.</a:t>
+              <a:t>‏.</a:t>
             </a:r>
             <a:endParaRPr lang="en-US" sz="1000" dirty="0"/>
           </a:p>
@@ -37642,7 +37655,7 @@
                 <a:latin typeface="Calibri" pitchFamily="34" charset="0"/>
                 <a:cs typeface="Amiri" pitchFamily="2" charset="-78"/>
               </a:rPr>
-              <a:t>Also: </a:t>
+              <a:t>Also: ‏</a:t>
             </a:r>
             <a:pPr algn="l" indent="0" marL="0">
               <a:buNone/>
@@ -37669,7 +37682,7 @@
                 <a:latin typeface="Calibri" pitchFamily="34" charset="0"/>
                 <a:cs typeface="Amiri" pitchFamily="2" charset="-78"/>
               </a:rPr>
-              <a:t> (personal information).</a:t>
+              <a:t>‏ (personal information).</a:t>
             </a:r>
             <a:endParaRPr lang="en-US" sz="1000" dirty="0"/>
           </a:p>
@@ -38587,6 +38600,19 @@
               <a:buNone/>
             </a:pPr>
             <a:r>
+              <a:rPr lang="en-US" sz="1000" i="1" dirty="0">
+                <a:solidFill>
+                  <a:srgbClr val="8A6D1E"/>
+                </a:solidFill>
+                <a:latin typeface="Calibri" pitchFamily="34" charset="0"/>
+                <a:cs typeface="Amiri" pitchFamily="2" charset="-78"/>
+              </a:rPr>
+              <a:t>‏</a:t>
+            </a:r>
+            <a:pPr algn="l" indent="0" marL="0">
+              <a:buNone/>
+            </a:pPr>
+            <a:r>
               <a:rPr lang="ar-SA" altLang="en-US" sz="1300" dirty="0">
                 <a:solidFill>
                   <a:srgbClr val="8A6D1E"/>
@@ -38608,7 +38634,7 @@
                 <a:latin typeface="Calibri" pitchFamily="34" charset="0"/>
                 <a:cs typeface="Amiri" pitchFamily="2" charset="-78"/>
               </a:rPr>
-              <a:t> = school subject</a:t>
+              <a:t>‏ = school subject</a:t>
             </a:r>
             <a:endParaRPr lang="en-US" sz="1000" dirty="0"/>
           </a:p>
